--- a/docs/slides/subsld/SubSLD法_academic.pptx
+++ b/docs/slides/subsld/SubSLD法_academic.pptx
@@ -3053,7 +3053,7 @@
                 <a:ea typeface="Hiragino Sans" pitchFamily="34" charset="-122"/>
                 <a:cs typeface="Hiragino Sans" pitchFamily="34" charset="-120"/>
               </a:rPr>
-              <a:t>全国適用 — 10地域・6,956所を同一コードで処理</a:t>
+              <a:t>全国適用 — 10地域・7,239所を同一コードで処理</a:t>
             </a:r>
             <a:endParaRPr lang="en-US" sz="2500" dirty="0"/>
           </a:p>
@@ -3571,7 +3571,7 @@
                 <a:ea typeface="Helvetica Neue" pitchFamily="34" charset="-122"/>
                 <a:cs typeface="Helvetica Neue" pitchFamily="34" charset="-120"/>
               </a:rPr>
-              <a:t>6,956</a:t>
+              <a:t>7,239</a:t>
             </a:r>
             <a:endParaRPr lang="en-US" sz="3800" dirty="0"/>
           </a:p>
@@ -3766,7 +3766,7 @@
                 <a:ea typeface="Hiragino Sans" pitchFamily="34" charset="-122"/>
                 <a:cs typeface="Hiragino Sans" pitchFamily="34" charset="-120"/>
               </a:rPr>
-              <a:t>母線way記載率（985/6,956・issue #49）</a:t>
+              <a:t>母線way記載率（issue #49 の測定値）</a:t>
             </a:r>
             <a:endParaRPr lang="en-US" sz="1150" dirty="0"/>
           </a:p>
@@ -5747,7 +5747,7 @@
                 <a:ea typeface="Hiragino Sans" pitchFamily="34" charset="-122"/>
                 <a:cs typeface="Hiragino Sans" pitchFamily="34" charset="-120"/>
               </a:rPr>
-              <a:t>全国6,956変電所の内部構造（母線・ベイ・端子・変圧器）をOSM実証拠のみから決定的に抽出</a:t>
+              <a:t>全国7,239変電所の内部構造（母線・ベイ・端子・変圧器）をOSM実証拠のみから決定的に抽出</a:t>
             </a:r>
             <a:endParaRPr lang="en-US" sz="1150" dirty="0"/>
           </a:p>
@@ -7919,7 +7919,7 @@
                 <a:ea typeface="Hiragino Sans" pitchFamily="34" charset="-122"/>
                 <a:cs typeface="Hiragino Sans" pitchFamily="34" charset="-120"/>
               </a:rPr>
-              <a:t>× 6,956所</a:t>
+              <a:t>× 7,239所</a:t>
             </a:r>
             <a:endParaRPr lang="en-US" sz="1100" dirty="0"/>
           </a:p>
